--- a/23-dars - Slayd maketi, dizayni, o'tish (Transition) sozlamalari bilan ishlash/23-dars - Slayd.pptx
+++ b/23-dars - Slayd maketi, dizayni, o'tish (Transition) sozlamalari bilan ishlash/23-dars - Slayd.pptx
@@ -4078,7 +4078,7 @@
                 <a:ea typeface="Calibri" pitchFamily="34" charset="-122"/>
                 <a:cs typeface="Calibri" pitchFamily="34" charset="-120"/>
               </a:rPr>
-              <a:t>22-darsда tayyorlagan PowerPoint taqdimotingni och.</a:t>
+              <a:t>22-darsda tayyorlagan PowerPoint taqdimotingni och.</a:t>
             </a:r>
             <a:endParaRPr lang="en-US" sz="1350" dirty="0"/>
           </a:p>
@@ -4179,7 +4179,7 @@
                 <a:ea typeface="Calibri" pitchFamily="34" charset="-122"/>
                 <a:cs typeface="Calibri" pitchFamily="34" charset="-120"/>
               </a:rPr>
-              <a:t>Har bir slaydга mos maket (Layout) tanla.</a:t>
+              <a:t>Har bir slaydga mos maket (Layout) tanla.</a:t>
             </a:r>
             <a:endParaRPr lang="en-US" sz="1350" dirty="0"/>
           </a:p>
@@ -4280,7 +4280,7 @@
                 <a:ea typeface="Calibri" pitchFamily="34" charset="-122"/>
                 <a:cs typeface="Calibri" pitchFamily="34" charset="-120"/>
               </a:rPr>
-              <a:t>Butun taqdimotга yagona dizayn mavzusini (Theme) qo'lla.</a:t>
+              <a:t>Butun taqdimotga yagona dizayn mavzusini (Theme) qo'lla.</a:t>
             </a:r>
             <a:endParaRPr lang="en-US" sz="1350" dirty="0"/>
           </a:p>
@@ -4482,7 +4482,7 @@
                 <a:ea typeface="Calibri" pitchFamily="34" charset="-122"/>
                 <a:cs typeface="Calibri" pitchFamily="34" charset="-120"/>
               </a:rPr>
-              <a:t>Google Slides taqdimotingда ham yangi dizayn va o'tish effektlarini qo'llab saqla.</a:t>
+              <a:t>Google Slides taqdimotingda ham yangi dizayn va o'tish effektlarini qo'llab saqla.</a:t>
             </a:r>
             <a:endParaRPr lang="en-US" sz="1350" dirty="0"/>
           </a:p>
@@ -5096,7 +5096,7 @@
                 <a:ea typeface="Calibri" pitchFamily="34" charset="-122"/>
                 <a:cs typeface="Calibri" pitchFamily="34" charset="-120"/>
               </a:rPr>
-              <a:t>Bir taqdimotни uch xil dizayn mavzusida sinab ko'rib, qaysi biri chiroyliroq ekanini aniqlang.</a:t>
+              <a:t>Bir taqdimotni uch xil dizayn mavzusida sinab ko'rib, qaysi biri chiroyliroq ekanini aniqlang.</a:t>
             </a:r>
             <a:endParaRPr lang="en-US" sz="1450" dirty="0"/>
           </a:p>
